--- a/assets/ppts/M4.2_ASN.1_and_MIB.pptx
+++ b/assets/ppts/M4.2_ASN.1_and_MIB.pptx
@@ -3141,8 +3141,8 @@
         </p:nvSpPr>
         <p:spPr>
           <a:xfrm>
-            <a:off x="822960" y="1188720"/>
-            <a:ext cx="164592" cy="4480560"/>
+            <a:off x="0" y="0"/>
+            <a:ext cx="12191695" cy="137160"/>
           </a:xfrm>
           <a:prstGeom prst="rect">
             <a:avLst/>
@@ -3178,14 +3178,57 @@
       </p:sp>
       <p:sp>
         <p:nvSpPr>
-          <p:cNvPr id="4" name="TextBox 3"/>
+          <p:cNvPr id="4" name="Rectangle 3"/>
+          <p:cNvSpPr/>
+          <p:nvPr/>
+        </p:nvSpPr>
+        <p:spPr>
+          <a:xfrm>
+            <a:off x="822960" y="1097280"/>
+            <a:ext cx="164592" cy="4663440"/>
+          </a:xfrm>
+          <a:prstGeom prst="rect">
+            <a:avLst/>
+          </a:prstGeom>
+          <a:solidFill>
+            <a:srgbClr val="D97706"/>
+          </a:solidFill>
+          <a:ln>
+            <a:noFill/>
+          </a:ln>
+        </p:spPr>
+        <p:style>
+          <a:lnRef idx="1">
+            <a:schemeClr val="accent1"/>
+          </a:lnRef>
+          <a:fillRef idx="3">
+            <a:schemeClr val="accent1"/>
+          </a:fillRef>
+          <a:effectRef idx="2">
+            <a:schemeClr val="accent1"/>
+          </a:effectRef>
+          <a:fontRef idx="minor">
+            <a:schemeClr val="lt1"/>
+          </a:fontRef>
+        </p:style>
+        <p:txBody>
+          <a:bodyPr rtlCol="0" anchor="ctr"/>
+          <a:lstStyle/>
+          <a:p>
+            <a:pPr algn="ctr"/>
+          </a:p>
+        </p:txBody>
+      </p:sp>
+      <p:sp>
+        <p:nvSpPr>
+          <p:cNvPr id="5" name="TextBox 4"/>
           <p:cNvSpPr txBox="1"/>
           <p:nvPr/>
         </p:nvSpPr>
         <p:spPr>
           <a:xfrm>
-            <a:off x="1280160" y="1097280"/>
-            <a:ext cx="10058400" cy="4663440"/>
+            <a:off x="1234440" y="1005840"/>
+            <a:ext cx="10241280" cy="4846320"/>
           </a:xfrm>
           <a:prstGeom prst="rect">
             <a:avLst/>
@@ -3200,70 +3243,165 @@
           <a:p>
             <a:pPr>
               <a:spcAft>
+                <a:spcPts val="1000"/>
+              </a:spcAft>
+              <a:defRPr b="1" sz="1300">
+                <a:solidFill>
+                  <a:srgbClr val="D97706"/>
+                </a:solidFill>
+              </a:defRPr>
+            </a:pPr>
+            <a:r>
+              <a:t>PCCST501 Computer Networks | KTU 2024 Scheme • MODULE 4 • M4.2</a:t>
+            </a:r>
+          </a:p>
+          <a:p>
+            <a:pPr>
+              <a:spcAft>
                 <a:spcPts val="1200"/>
               </a:spcAft>
-              <a:defRPr b="1" sz="1300">
-                <a:solidFill>
-                  <a:srgbClr val="D97706"/>
+              <a:defRPr b="1" sz="3000">
+                <a:solidFill>
+                  <a:srgbClr val="F8FAFC"/>
                 </a:solidFill>
               </a:defRPr>
             </a:pPr>
             <a:r>
-              <a:t>PCCST501 Computer Networks | KTU 2024 Scheme • MODULE 4 • M4.2</a:t>
+              <a:t>Structure of Management Information (SMI) &amp; ASN.1</a:t>
             </a:r>
           </a:p>
           <a:p>
             <a:pPr>
               <a:spcAft>
-                <a:spcPts val="1400"/>
+                <a:spcPts val="2400"/>
               </a:spcAft>
-              <a:defRPr b="1" sz="3200">
-                <a:solidFill>
-                  <a:srgbClr val="F8FAFC"/>
+              <a:defRPr sz="1600">
+                <a:solidFill>
+                  <a:srgbClr val="94A3B8"/>
                 </a:solidFill>
               </a:defRPr>
             </a:pPr>
             <a:r>
-              <a:t>Abstract Syntax Notation One (ASN.1) &amp; MIB-2</a:t>
+              <a:t>Abstract Syntax Notation One (ASN.1), SMIv2 Macro Definitions, MIB OID Tree Hierarchy (1.3.6.1.2.1), Standard MIB-II Groups, BER Encoding</a:t>
             </a:r>
           </a:p>
           <a:p>
             <a:pPr>
               <a:spcAft>
-                <a:spcPts val="2800"/>
+                <a:spcPts val="300"/>
               </a:spcAft>
-              <a:defRPr sz="1700">
+              <a:defRPr b="1" sz="1350">
+                <a:solidFill>
+                  <a:srgbClr val="E2E8F0"/>
+                </a:solidFill>
+              </a:defRPr>
+            </a:pPr>
+            <a:r>
+              <a:t>Prepared by: Prof. Anju Markose | Assistant Professor, Dept. of CSE | VJCET</a:t>
+            </a:r>
+          </a:p>
+          <a:p>
+            <a:pPr>
+              <a:defRPr sz="1150">
                 <a:solidFill>
                   <a:srgbClr val="94A3B8"/>
                 </a:solidFill>
               </a:defRPr>
             </a:pPr>
             <a:r>
-              <a:t>ASN.1 Data Types, Basic Encoding Rules (BER) Tag-Length-Value Format, MIB-2 Tree Hierarchy &amp; OID Structure</a:t>
-            </a:r>
-          </a:p>
+              <a:t>Viswajyothi College of Engineering and Technology (VJCET), Vazhakulam • KTU S5 CSE</a:t>
+            </a:r>
+          </a:p>
+        </p:txBody>
+      </p:sp>
+      <p:sp>
+        <p:nvSpPr>
+          <p:cNvPr id="6" name="Rounded Rectangle 5"/>
+          <p:cNvSpPr/>
+          <p:nvPr/>
+        </p:nvSpPr>
+        <p:spPr>
+          <a:xfrm>
+            <a:off x="8412480" y="5120640"/>
+            <a:ext cx="3017520" cy="822960"/>
+          </a:xfrm>
+          <a:prstGeom prst="roundRect">
+            <a:avLst/>
+          </a:prstGeom>
+          <a:solidFill>
+            <a:srgbClr val="1E293B"/>
+          </a:solidFill>
+          <a:ln w="12700">
+            <a:solidFill>
+              <a:srgbClr val="0E7490"/>
+            </a:solidFill>
+          </a:ln>
+        </p:spPr>
+        <p:style>
+          <a:lnRef idx="1">
+            <a:schemeClr val="accent1"/>
+          </a:lnRef>
+          <a:fillRef idx="3">
+            <a:schemeClr val="accent1"/>
+          </a:fillRef>
+          <a:effectRef idx="2">
+            <a:schemeClr val="accent1"/>
+          </a:effectRef>
+          <a:fontRef idx="minor">
+            <a:schemeClr val="lt1"/>
+          </a:fontRef>
+        </p:style>
+        <p:txBody>
+          <a:bodyPr rtlCol="0" anchor="ctr"/>
+          <a:lstStyle/>
+          <a:p>
+            <a:pPr algn="ctr"/>
+          </a:p>
+        </p:txBody>
+      </p:sp>
+      <p:sp>
+        <p:nvSpPr>
+          <p:cNvPr id="7" name="TextBox 6"/>
+          <p:cNvSpPr txBox="1"/>
+          <p:nvPr/>
+        </p:nvSpPr>
+        <p:spPr>
+          <a:xfrm>
+            <a:off x="8503920" y="5166360"/>
+            <a:ext cx="2834640" cy="731520"/>
+          </a:xfrm>
+          <a:prstGeom prst="rect">
+            <a:avLst/>
+          </a:prstGeom>
+          <a:noFill/>
+        </p:spPr>
+        <p:txBody>
+          <a:bodyPr wrap="none">
+            <a:spAutoFit/>
+          </a:bodyPr>
+          <a:lstStyle/>
           <a:p>
             <a:pPr>
-              <a:defRPr b="1" sz="1300">
-                <a:solidFill>
-                  <a:srgbClr val="E2E8F0"/>
+              <a:defRPr b="1" sz="1050">
+                <a:solidFill>
+                  <a:srgbClr val="D97706"/>
                 </a:solidFill>
               </a:defRPr>
             </a:pPr>
             <a:r>
-              <a:t>Prepared by: Prof. Anju Markose | Assistant Professor, Dept. of CSE | VJCET</a:t>
+              <a:t>KTU B.Tech Curriculum</a:t>
             </a:r>
           </a:p>
           <a:p>
             <a:pPr>
-              <a:defRPr sz="1100">
-                <a:solidFill>
-                  <a:srgbClr val="94A3B8"/>
+              <a:defRPr sz="950">
+                <a:solidFill>
+                  <a:srgbClr val="F8FAFC"/>
                 </a:solidFill>
               </a:defRPr>
             </a:pPr>
             <a:r>
-              <a:t>Viswajyothi College of Engineering and Technology (VJCET), Vazhakulam</a:t>
+              <a:t>Official Classroom Slide Deck</a:t>
             </a:r>
           </a:p>
         </p:txBody>
@@ -3395,14 +3533,14 @@
           <a:lstStyle/>
           <a:p>
             <a:pPr>
-              <a:defRPr b="1" sz="2300">
+              <a:defRPr b="1" sz="2200">
                 <a:solidFill>
                   <a:srgbClr val="F8FAFC"/>
                 </a:solidFill>
               </a:defRPr>
             </a:pPr>
             <a:r>
-              <a:t>4.2.1 ASN.1 Data Types &amp; BER Wire Encoding</a:t>
+              <a:t>4.2.1 SMIv2 &amp; MIB Object Identifier (OID) Tree Hierarchy</a:t>
             </a:r>
           </a:p>
         </p:txBody>
@@ -3437,7 +3575,7 @@
               </a:defRPr>
             </a:pPr>
             <a:r>
-              <a:t>M4.2 ASN.1 &amp; BER</a:t>
+              <a:t>M4.2 SMI &amp; MIB HIERARCHY</a:t>
             </a:r>
           </a:p>
         </p:txBody>
@@ -3450,7 +3588,7 @@
         </p:nvSpPr>
         <p:spPr>
           <a:xfrm>
-            <a:off x="731520" y="1280160"/>
+            <a:off x="731520" y="1234440"/>
             <a:ext cx="6858000" cy="4937760"/>
           </a:xfrm>
           <a:prstGeom prst="rect">
@@ -3468,29 +3606,29 @@
               <a:spcAft>
                 <a:spcPts val="200"/>
               </a:spcAft>
-              <a:defRPr b="1" sz="1500">
+              <a:defRPr b="1" sz="1450">
                 <a:solidFill>
                   <a:srgbClr val="0F1E4A"/>
                 </a:solidFill>
               </a:defRPr>
             </a:pPr>
             <a:r>
-              <a:t>• Role of ASN.1</a:t>
+              <a:t>• SMI (Structure of Management Information - RFC 2578)</a:t>
             </a:r>
           </a:p>
           <a:p>
             <a:pPr>
               <a:spcAft>
-                <a:spcPts val="800"/>
+                <a:spcPts val="700"/>
               </a:spcAft>
-              <a:defRPr sz="1300">
-                <a:solidFill>
-                  <a:srgbClr val="1E293B"/>
+              <a:defRPr sz="1250">
+                <a:solidFill>
+                  <a:srgbClr val="0F172A"/>
                 </a:solidFill>
               </a:defRPr>
             </a:pPr>
             <a:r>
-              <a:t>   A formal, machine-independent language for specifying data types and structured messages independently of operating system hardware or byte-ordering conventions.</a:t>
+              <a:t>   The formal language defining the rules for naming, specifying data types, and structuring management objects in the MIB.</a:t>
             </a:r>
           </a:p>
           <a:p>
@@ -3498,29 +3636,29 @@
               <a:spcAft>
                 <a:spcPts val="200"/>
               </a:spcAft>
-              <a:defRPr b="1" sz="1500">
+              <a:defRPr b="1" sz="1450">
                 <a:solidFill>
                   <a:srgbClr val="0F1E4A"/>
                 </a:solidFill>
               </a:defRPr>
             </a:pPr>
             <a:r>
-              <a:t>• Primitive ASN.1 Data Types</a:t>
+              <a:t>• ASN.1 (Abstract Syntax Notation One)</a:t>
             </a:r>
           </a:p>
           <a:p>
             <a:pPr>
               <a:spcAft>
-                <a:spcPts val="800"/>
+                <a:spcPts val="700"/>
               </a:spcAft>
-              <a:defRPr sz="1300">
-                <a:solidFill>
-                  <a:srgbClr val="1E293B"/>
+              <a:defRPr sz="1250">
+                <a:solidFill>
+                  <a:srgbClr val="0F172A"/>
                 </a:solidFill>
               </a:defRPr>
             </a:pPr>
             <a:r>
-              <a:t>   `INTEGER` (signed integer), `OCTET STRING` (byte sequence), `OBJECT IDENTIFIER` (dotted OID path), `BOOLEAN` (True/False), `NULL` (empty placeholder).</a:t>
+              <a:t>   A formal notation for describing data structures independently of machine hardware architectures. Defines primitives (INTEGER, OCTET STRING, OBJECT IDENTIFIER, SEQUENCE).</a:t>
             </a:r>
           </a:p>
           <a:p>
@@ -3528,29 +3666,29 @@
               <a:spcAft>
                 <a:spcPts val="200"/>
               </a:spcAft>
-              <a:defRPr b="1" sz="1500">
+              <a:defRPr b="1" sz="1450">
                 <a:solidFill>
                   <a:srgbClr val="0F1E4A"/>
                 </a:solidFill>
               </a:defRPr>
             </a:pPr>
             <a:r>
-              <a:t>• Constructed ASN.1 Data Types</a:t>
+              <a:t>• Globally Unique OID Tree Hierarchy</a:t>
             </a:r>
           </a:p>
           <a:p>
             <a:pPr>
               <a:spcAft>
-                <a:spcPts val="800"/>
+                <a:spcPts val="700"/>
               </a:spcAft>
-              <a:defRPr sz="1300">
-                <a:solidFill>
-                  <a:srgbClr val="1E293B"/>
+              <a:defRPr sz="1250">
+                <a:solidFill>
+                  <a:srgbClr val="0F172A"/>
                 </a:solidFill>
               </a:defRPr>
             </a:pPr>
             <a:r>
-              <a:t>   `SEQUENCE` (ordered list of different types - like a C struct), `SEQUENCE OF` (ordered list of same type - like an array).</a:t>
+              <a:t>   Every manageable variable is assigned a globally unique dot-delimited Object Identifier (OID) arranged in an inverted tree:</a:t>
             </a:r>
           </a:p>
           <a:p>
@@ -3558,29 +3696,29 @@
               <a:spcAft>
                 <a:spcPts val="200"/>
               </a:spcAft>
-              <a:defRPr b="1" sz="1500">
+              <a:defRPr b="1" sz="1450">
                 <a:solidFill>
                   <a:srgbClr val="0F1E4A"/>
                 </a:solidFill>
               </a:defRPr>
             </a:pPr>
             <a:r>
-              <a:t>• Basic Encoding Rules (BER - TLV Format)</a:t>
+              <a:t>• Standard Internet MIB-2 Path</a:t>
             </a:r>
           </a:p>
           <a:p>
             <a:pPr>
               <a:spcAft>
-                <a:spcPts val="800"/>
+                <a:spcPts val="700"/>
               </a:spcAft>
-              <a:defRPr sz="1300">
-                <a:solidFill>
-                  <a:srgbClr val="1E293B"/>
+              <a:defRPr sz="1250">
+                <a:solidFill>
+                  <a:srgbClr val="0F172A"/>
                 </a:solidFill>
               </a:defRPr>
             </a:pPr>
             <a:r>
-              <a:t>   Serializes ASN.1 objects into wire bytes as `[Tag | Length | Value]`.</a:t>
+              <a:t>   `iso(1)` -&gt; `org(3)` -&gt; `dod(6)` -&gt; `internet(1)` -&gt; `mgmt(2)` -&gt; `mib-2(1)` = **`1.3.6.1.2.1`**.</a:t>
             </a:r>
           </a:p>
           <a:p>
@@ -3588,29 +3726,59 @@
               <a:spcAft>
                 <a:spcPts val="200"/>
               </a:spcAft>
-              <a:defRPr b="1" sz="1500">
+              <a:defRPr b="1" sz="1450">
                 <a:solidFill>
                   <a:srgbClr val="0F1E4A"/>
                 </a:solidFill>
               </a:defRPr>
             </a:pPr>
             <a:r>
-              <a:t>• BER Example</a:t>
+              <a:t>• Standard MIB-II Functional Groups</a:t>
             </a:r>
           </a:p>
           <a:p>
             <a:pPr>
               <a:spcAft>
-                <a:spcPts val="800"/>
+                <a:spcPts val="700"/>
               </a:spcAft>
-              <a:defRPr sz="1300">
-                <a:solidFill>
-                  <a:srgbClr val="1E293B"/>
+              <a:defRPr sz="1250">
+                <a:solidFill>
+                  <a:srgbClr val="0F172A"/>
                 </a:solidFill>
               </a:defRPr>
             </a:pPr>
             <a:r>
-              <a:t>   Tag specifies data type (e.g. `0x02` for INTEGER), Length specifies payload byte count (e.g. `0x01`), Value contains actual data (e.g. `0x05` $\implies$ `02 01 05` encodes integer 5).</a:t>
+              <a:t>   1. `system (1.3.6.1.2.1.1)`: Device name, description, uptime, contact. \n 2. `interfaces (1.3.6.1.2.1.2)`: Subnet interfaces, MTU, speed, packet counters. \n 3. `ip (1.3.6.1.2.1.4)`: IP routing tables, forward state, TTL, packet discards. \n 4. `tcp (1.3.6.1.2.1.6)`: Active TCP connection table, current connections, timeouts. \n 5. `udp (1.3.6.1.2.1.7)`: UDP listener table and datagram counters.</a:t>
+            </a:r>
+          </a:p>
+          <a:p>
+            <a:pPr>
+              <a:spcAft>
+                <a:spcPts val="200"/>
+              </a:spcAft>
+              <a:defRPr b="1" sz="1450">
+                <a:solidFill>
+                  <a:srgbClr val="0F1E4A"/>
+                </a:solidFill>
+              </a:defRPr>
+            </a:pPr>
+            <a:r>
+              <a:t>• Basic Encoding Rules (BER)</a:t>
+            </a:r>
+          </a:p>
+          <a:p>
+            <a:pPr>
+              <a:spcAft>
+                <a:spcPts val="700"/>
+              </a:spcAft>
+              <a:defRPr sz="1250">
+                <a:solidFill>
+                  <a:srgbClr val="0F172A"/>
+                </a:solidFill>
+              </a:defRPr>
+            </a:pPr>
+            <a:r>
+              <a:t>   Transfers data over wire using **TLV format**: `Tag (Type)` | `Length` | `Value`.</a:t>
             </a:r>
           </a:p>
         </p:txBody>
@@ -3623,14 +3791,14 @@
         </p:nvSpPr>
         <p:spPr>
           <a:xfrm>
-            <a:off x="7955279" y="1280160"/>
-            <a:ext cx="3566160" cy="4846320"/>
+            <a:off x="7955279" y="1234440"/>
+            <a:ext cx="3566160" cy="4892040"/>
           </a:xfrm>
           <a:prstGeom prst="roundRect">
             <a:avLst/>
           </a:prstGeom>
           <a:solidFill>
-            <a:srgbClr val="F1F5F9"/>
+            <a:srgbClr val="F8FAFC"/>
           </a:solidFill>
           <a:ln w="19050">
             <a:solidFill>
@@ -3668,7 +3836,7 @@
         </p:nvSpPr>
         <p:spPr>
           <a:xfrm>
-            <a:off x="8138160" y="1417320"/>
+            <a:off x="8138160" y="1371600"/>
             <a:ext cx="3200400" cy="4572000"/>
           </a:xfrm>
           <a:prstGeom prst="rect">
@@ -3693,7 +3861,7 @@
               </a:defRPr>
             </a:pPr>
             <a:r>
-              <a:t>BER TLV Structure</a:t>
+              <a:t>Standard MIB-2 Groups</a:t>
             </a:r>
           </a:p>
           <a:p>
@@ -3703,12 +3871,12 @@
               </a:spcAft>
               <a:defRPr sz="1200">
                 <a:solidFill>
-                  <a:srgbClr val="1E293B"/>
+                  <a:srgbClr val="0F172A"/>
                 </a:solidFill>
               </a:defRPr>
             </a:pPr>
             <a:r>
-              <a:t>→ Tag (Type): 1 Byte identifier</a:t>
+              <a:t>→ 1.3.6.1.2.1.1: system</a:t>
             </a:r>
           </a:p>
           <a:p>
@@ -3718,12 +3886,12 @@
               </a:spcAft>
               <a:defRPr sz="1200">
                 <a:solidFill>
-                  <a:srgbClr val="1E293B"/>
+                  <a:srgbClr val="0F172A"/>
                 </a:solidFill>
               </a:defRPr>
             </a:pPr>
             <a:r>
-              <a:t>→ Length: Byte count of Value</a:t>
+              <a:t>→ 1.3.6.1.2.1.2: interfaces</a:t>
             </a:r>
           </a:p>
           <a:p>
@@ -3733,12 +3901,12 @@
               </a:spcAft>
               <a:defRPr sz="1200">
                 <a:solidFill>
-                  <a:srgbClr val="1E293B"/>
+                  <a:srgbClr val="0F172A"/>
                 </a:solidFill>
               </a:defRPr>
             </a:pPr>
             <a:r>
-              <a:t>→ Value: Actual binary payload</a:t>
+              <a:t>→ 1.3.6.1.2.1.4: ip</a:t>
             </a:r>
           </a:p>
           <a:p>
@@ -3748,12 +3916,12 @@
               </a:spcAft>
               <a:defRPr sz="1200">
                 <a:solidFill>
-                  <a:srgbClr val="1E293B"/>
+                  <a:srgbClr val="0F172A"/>
                 </a:solidFill>
               </a:defRPr>
             </a:pPr>
             <a:r>
-              <a:t>→ 02 01 05: INTEGER 5</a:t>
+              <a:t>→ 1.3.6.1.2.1.6: tcp</a:t>
             </a:r>
           </a:p>
           <a:p>
@@ -3763,12 +3931,42 @@
               </a:spcAft>
               <a:defRPr sz="1200">
                 <a:solidFill>
-                  <a:srgbClr val="1E293B"/>
+                  <a:srgbClr val="0F172A"/>
                 </a:solidFill>
               </a:defRPr>
             </a:pPr>
             <a:r>
-              <a:t>→ 04 03 41 42 43: OCTET STRING 'ABC'</a:t>
+              <a:t>→ 1.3.6.1.2.1.7: udp</a:t>
+            </a:r>
+          </a:p>
+          <a:p>
+            <a:pPr>
+              <a:spcAft>
+                <a:spcPts val="600"/>
+              </a:spcAft>
+              <a:defRPr sz="1200">
+                <a:solidFill>
+                  <a:srgbClr val="0F172A"/>
+                </a:solidFill>
+              </a:defRPr>
+            </a:pPr>
+            <a:r>
+              <a:t>→ 1.3.6.1.2.1.11: snmp</a:t>
+            </a:r>
+          </a:p>
+          <a:p>
+            <a:pPr>
+              <a:spcAft>
+                <a:spcPts val="600"/>
+              </a:spcAft>
+              <a:defRPr sz="1200">
+                <a:solidFill>
+                  <a:srgbClr val="0F172A"/>
+                </a:solidFill>
+              </a:defRPr>
+            </a:pPr>
+            <a:r>
+              <a:t>→ Encoding: BER TLV format</a:t>
             </a:r>
           </a:p>
         </p:txBody>
@@ -3781,8 +3979,8 @@
         </p:nvSpPr>
         <p:spPr>
           <a:xfrm>
-            <a:off x="731520" y="6309360"/>
-            <a:ext cx="10789920" cy="365760"/>
+            <a:off x="731520" y="6327648"/>
+            <a:ext cx="10789920" cy="320040"/>
           </a:xfrm>
           <a:prstGeom prst="rect">
             <a:avLst/>
@@ -3804,6 +4002,41 @@
             </a:pPr>
             <a:r>
               <a:t>PCCST501 Computer Networks | KTU 2024 Scheme | Prof. Anju Markose | Assistant Professor, Dept. of CSE | VJCET</a:t>
+            </a:r>
+          </a:p>
+        </p:txBody>
+      </p:sp>
+      <p:sp>
+        <p:nvSpPr>
+          <p:cNvPr id="10" name="TextBox 9"/>
+          <p:cNvSpPr txBox="1"/>
+          <p:nvPr/>
+        </p:nvSpPr>
+        <p:spPr>
+          <a:xfrm>
+            <a:off x="6858000" y="6327648"/>
+            <a:ext cx="4572000" cy="320040"/>
+          </a:xfrm>
+          <a:prstGeom prst="rect">
+            <a:avLst/>
+          </a:prstGeom>
+          <a:noFill/>
+        </p:spPr>
+        <p:txBody>
+          <a:bodyPr wrap="none">
+            <a:spAutoFit/>
+          </a:bodyPr>
+          <a:lstStyle/>
+          <a:p>
+            <a:pPr algn="r">
+              <a:defRPr sz="950">
+                <a:solidFill>
+                  <a:srgbClr val="64748B"/>
+                </a:solidFill>
+              </a:defRPr>
+            </a:pPr>
+            <a:r>
+              <a:t>Dept. of CSE, VJCET</a:t>
             </a:r>
           </a:p>
         </p:txBody>
@@ -3935,14 +4168,14 @@
           <a:lstStyle/>
           <a:p>
             <a:pPr>
-              <a:defRPr b="1" sz="2300">
+              <a:defRPr b="1" sz="2100">
                 <a:solidFill>
                   <a:srgbClr val="F8FAFC"/>
                 </a:solidFill>
               </a:defRPr>
             </a:pPr>
             <a:r>
-              <a:t>4.2.2 Management Information Base (MIB-2) Tree &amp; OIDs</a:t>
+              <a:t>🎯 Exam Booster &amp; Review: SMI &amp; ASN.1</a:t>
             </a:r>
           </a:p>
         </p:txBody>
@@ -3977,21 +4210,66 @@
               </a:defRPr>
             </a:pPr>
             <a:r>
-              <a:t>M4.2 MIB-2 HIERARCHY</a:t>
-            </a:r>
-          </a:p>
-        </p:txBody>
-      </p:sp>
-      <p:sp>
-        <p:nvSpPr>
-          <p:cNvPr id="6" name="TextBox 5"/>
+              <a:t>M4.2</a:t>
+            </a:r>
+          </a:p>
+        </p:txBody>
+      </p:sp>
+      <p:sp>
+        <p:nvSpPr>
+          <p:cNvPr id="6" name="Rounded Rectangle 5"/>
+          <p:cNvSpPr/>
+          <p:nvPr/>
+        </p:nvSpPr>
+        <p:spPr>
+          <a:xfrm>
+            <a:off x="731520" y="1234440"/>
+            <a:ext cx="5303520" cy="4892040"/>
+          </a:xfrm>
+          <a:prstGeom prst="roundRect">
+            <a:avLst/>
+          </a:prstGeom>
+          <a:solidFill>
+            <a:srgbClr val="FEF3C7"/>
+          </a:solidFill>
+          <a:ln w="19050">
+            <a:solidFill>
+              <a:srgbClr val="D97706"/>
+            </a:solidFill>
+          </a:ln>
+        </p:spPr>
+        <p:style>
+          <a:lnRef idx="1">
+            <a:schemeClr val="accent1"/>
+          </a:lnRef>
+          <a:fillRef idx="3">
+            <a:schemeClr val="accent1"/>
+          </a:fillRef>
+          <a:effectRef idx="2">
+            <a:schemeClr val="accent1"/>
+          </a:effectRef>
+          <a:fontRef idx="minor">
+            <a:schemeClr val="lt1"/>
+          </a:fontRef>
+        </p:style>
+        <p:txBody>
+          <a:bodyPr rtlCol="0" anchor="ctr"/>
+          <a:lstStyle/>
+          <a:p>
+            <a:pPr algn="ctr"/>
+          </a:p>
+        </p:txBody>
+      </p:sp>
+      <p:sp>
+        <p:nvSpPr>
+          <p:cNvPr id="7" name="TextBox 6"/>
           <p:cNvSpPr txBox="1"/>
           <p:nvPr/>
         </p:nvSpPr>
         <p:spPr>
           <a:xfrm>
-            <a:off x="731520" y="1280160"/>
-            <a:ext cx="6858000" cy="4937760"/>
+            <a:off x="914400" y="1371600"/>
+            <a:ext cx="4937760" cy="4572000"/>
           </a:xfrm>
           <a:prstGeom prst="rect">
             <a:avLst/>
@@ -4006,171 +4284,81 @@
           <a:p>
             <a:pPr>
               <a:spcAft>
-                <a:spcPts val="200"/>
+                <a:spcPts val="1000"/>
               </a:spcAft>
-              <a:defRPr b="1" sz="1500">
-                <a:solidFill>
-                  <a:srgbClr val="0F1E4A"/>
+              <a:defRPr b="1" sz="1450">
+                <a:solidFill>
+                  <a:srgbClr val="D97706"/>
                 </a:solidFill>
               </a:defRPr>
             </a:pPr>
             <a:r>
-              <a:t>• MIB-2 Tree Hierarchy</a:t>
+              <a:t>📚 KTU High-Yield Questions (K2 Understand)</a:t>
             </a:r>
           </a:p>
           <a:p>
             <a:pPr>
               <a:spcAft>
-                <a:spcPts val="800"/>
+                <a:spcPts val="700"/>
               </a:spcAft>
-              <a:defRPr sz="1300">
-                <a:solidFill>
-                  <a:srgbClr val="1E293B"/>
+              <a:defRPr sz="1200">
+                <a:solidFill>
+                  <a:srgbClr val="0F172A"/>
                 </a:solidFill>
               </a:defRPr>
             </a:pPr>
             <a:r>
-              <a:t>   All managed objects are organized into a globally unique hierarchical tree identified by dotted numeric Object Identifiers (OIDs).</a:t>
+              <a:t>Q: Explain the role of SMI and ASN.1 in SNMP network management. (6 Marks)</a:t>
             </a:r>
           </a:p>
           <a:p>
             <a:pPr>
               <a:spcAft>
-                <a:spcPts val="200"/>
+                <a:spcPts val="700"/>
               </a:spcAft>
-              <a:defRPr b="1" sz="1500">
-                <a:solidFill>
-                  <a:srgbClr val="0F1E4A"/>
+              <a:defRPr sz="1200">
+                <a:solidFill>
+                  <a:srgbClr val="0F172A"/>
                 </a:solidFill>
               </a:defRPr>
             </a:pPr>
             <a:r>
-              <a:t>• Standard Internet Root Path</a:t>
+              <a:t>Q: Illustrate the MIB Object Identifier (OID) tree hierarchy from Root to MIB-II (`1.3.6.1.2.1`) and describe the primary MIB-II groups (`system`, `interfaces`, `ip`, `tcp`). (8 Marks)</a:t>
             </a:r>
           </a:p>
           <a:p>
             <a:pPr>
               <a:spcAft>
-                <a:spcPts val="800"/>
+                <a:spcPts val="700"/>
               </a:spcAft>
-              <a:defRPr sz="1300">
-                <a:solidFill>
-                  <a:srgbClr val="1E293B"/>
+              <a:defRPr sz="1200">
+                <a:solidFill>
+                  <a:srgbClr val="0F172A"/>
                 </a:solidFill>
               </a:defRPr>
             </a:pPr>
             <a:r>
-              <a:t>   `iso(1) . org(3) . dod(6) . internet(1) . mgmt(2) . mib-2(1)` = `1.3.6.1.2.1`.</a:t>
-            </a:r>
-          </a:p>
-          <a:p>
-            <a:pPr>
-              <a:spcAft>
-                <a:spcPts val="200"/>
-              </a:spcAft>
-              <a:defRPr b="1" sz="1500">
-                <a:solidFill>
-                  <a:srgbClr val="0F1E4A"/>
-                </a:solidFill>
-              </a:defRPr>
-            </a:pPr>
-            <a:r>
-              <a:t>• Key MIB-2 Functional Groups</a:t>
-            </a:r>
-          </a:p>
-          <a:p>
-            <a:pPr>
-              <a:spcAft>
-                <a:spcPts val="800"/>
-              </a:spcAft>
-              <a:defRPr sz="1300">
-                <a:solidFill>
-                  <a:srgbClr val="1E293B"/>
-                </a:solidFill>
-              </a:defRPr>
-            </a:pPr>
-            <a:r>
-              <a:t>   1. `system (1.3.6.1.2.1.1)`: Device name, description, uptime, contact.</a:t>
-            </a:r>
-          </a:p>
-          <a:p>
-            <a:pPr>
-              <a:spcAft>
-                <a:spcPts val="200"/>
-              </a:spcAft>
-              <a:defRPr b="1" sz="1500">
-                <a:solidFill>
-                  <a:srgbClr val="0F1E4A"/>
-                </a:solidFill>
-              </a:defRPr>
-            </a:pPr>
-            <a:r>
-              <a:t>• 2. `interfaces (1.3.6.1.2.1.2)`</a:t>
-            </a:r>
-          </a:p>
-          <a:p>
-            <a:pPr>
-              <a:spcAft>
-                <a:spcPts val="800"/>
-              </a:spcAft>
-              <a:defRPr sz="1300">
-                <a:solidFill>
-                  <a:srgbClr val="1E293B"/>
-                </a:solidFill>
-              </a:defRPr>
-            </a:pPr>
-            <a:r>
-              <a:t>   Number of interfaces, interface speed, MTU, packet counters (`ifInOctets`, `ifOutOctets`).</a:t>
-            </a:r>
-          </a:p>
-          <a:p>
-            <a:pPr>
-              <a:spcAft>
-                <a:spcPts val="200"/>
-              </a:spcAft>
-              <a:defRPr b="1" sz="1500">
-                <a:solidFill>
-                  <a:srgbClr val="0F1E4A"/>
-                </a:solidFill>
-              </a:defRPr>
-            </a:pPr>
-            <a:r>
-              <a:t>• 3. `ip (1.3.6.1.2.1.4)` &amp; `tcp (1.3.6.1.2.1.6)`</a:t>
-            </a:r>
-          </a:p>
-          <a:p>
-            <a:pPr>
-              <a:spcAft>
-                <a:spcPts val="800"/>
-              </a:spcAft>
-              <a:defRPr sz="1300">
-                <a:solidFill>
-                  <a:srgbClr val="1E293B"/>
-                </a:solidFill>
-              </a:defRPr>
-            </a:pPr>
-            <a:r>
-              <a:t>   IP routing table (`ipRouteTable`), forwarding counters, active TCP connection table (`tcpConnTable`).</a:t>
-            </a:r>
-          </a:p>
-        </p:txBody>
-      </p:sp>
-      <p:sp>
-        <p:nvSpPr>
-          <p:cNvPr id="7" name="Rounded Rectangle 6"/>
+              <a:t>Q: Explain Basic Encoding Rules (BER) and the Tag-Length-Value (TLV) encoding format with an example. (6 Marks)</a:t>
+            </a:r>
+          </a:p>
+        </p:txBody>
+      </p:sp>
+      <p:sp>
+        <p:nvSpPr>
+          <p:cNvPr id="8" name="Rounded Rectangle 7"/>
           <p:cNvSpPr/>
           <p:nvPr/>
         </p:nvSpPr>
         <p:spPr>
           <a:xfrm>
-            <a:off x="7955279" y="1280160"/>
-            <a:ext cx="3566160" cy="4846320"/>
+            <a:off x="6309360" y="1234440"/>
+            <a:ext cx="5212080" cy="4892040"/>
           </a:xfrm>
           <a:prstGeom prst="roundRect">
             <a:avLst/>
           </a:prstGeom>
           <a:solidFill>
-            <a:srgbClr val="F1F5F9"/>
+            <a:srgbClr val="EEF2FF"/>
           </a:solidFill>
           <a:ln w="19050">
             <a:solidFill>
@@ -4202,14 +4390,14 @@
       </p:sp>
       <p:sp>
         <p:nvSpPr>
-          <p:cNvPr id="8" name="TextBox 7"/>
+          <p:cNvPr id="9" name="TextBox 8"/>
           <p:cNvSpPr txBox="1"/>
           <p:nvPr/>
         </p:nvSpPr>
         <p:spPr>
           <a:xfrm>
-            <a:off x="8138160" y="1417320"/>
-            <a:ext cx="3200400" cy="4572000"/>
+            <a:off x="6492240" y="1371600"/>
+            <a:ext cx="4846320" cy="4572000"/>
           </a:xfrm>
           <a:prstGeom prst="rect">
             <a:avLst/>
@@ -4226,14 +4414,14 @@
               <a:spcAft>
                 <a:spcPts val="1000"/>
               </a:spcAft>
-              <a:defRPr b="1" sz="1500">
+              <a:defRPr b="1" sz="1450">
                 <a:solidFill>
                   <a:srgbClr val="0E7490"/>
                 </a:solidFill>
               </a:defRPr>
             </a:pPr>
             <a:r>
-              <a:t>Key MIB OIDs</a:t>
+              <a:t>💡 Critical Conceptual Takeaways</a:t>
             </a:r>
           </a:p>
           <a:p>
@@ -4243,12 +4431,12 @@
               </a:spcAft>
               <a:defRPr sz="1200">
                 <a:solidFill>
-                  <a:srgbClr val="1E293B"/>
+                  <a:srgbClr val="0F172A"/>
                 </a:solidFill>
               </a:defRPr>
             </a:pPr>
             <a:r>
-              <a:t>→ sysDescr: 1.3.6.1.2.1.1.1</a:t>
+              <a:t>✔ SMI defines how MIB data objects are formally defined using ASN.1 syntax.</a:t>
             </a:r>
           </a:p>
           <a:p>
@@ -4258,12 +4446,12 @@
               </a:spcAft>
               <a:defRPr sz="1200">
                 <a:solidFill>
-                  <a:srgbClr val="1E293B"/>
+                  <a:srgbClr val="0F172A"/>
                 </a:solidFill>
               </a:defRPr>
             </a:pPr>
             <a:r>
-              <a:t>→ sysUpTime: 1.3.6.1.2.1.1.3</a:t>
+              <a:t>✔ OID `1.3.6.1.2.1` is the root prefix for all standard Internet MIB-II management objects.</a:t>
             </a:r>
           </a:p>
           <a:p>
@@ -4273,56 +4461,26 @@
               </a:spcAft>
               <a:defRPr sz="1200">
                 <a:solidFill>
-                  <a:srgbClr val="1E293B"/>
+                  <a:srgbClr val="0F172A"/>
                 </a:solidFill>
               </a:defRPr>
             </a:pPr>
             <a:r>
-              <a:t>→ ifNumber: 1.3.6.1.2.1.2.1</a:t>
-            </a:r>
-          </a:p>
-          <a:p>
-            <a:pPr>
-              <a:spcAft>
-                <a:spcPts val="600"/>
-              </a:spcAft>
-              <a:defRPr sz="1200">
-                <a:solidFill>
-                  <a:srgbClr val="1E293B"/>
-                </a:solidFill>
-              </a:defRPr>
-            </a:pPr>
-            <a:r>
-              <a:t>→ ipForwarding: 1.3.6.1.2.1.4.1</a:t>
-            </a:r>
-          </a:p>
-          <a:p>
-            <a:pPr>
-              <a:spcAft>
-                <a:spcPts val="600"/>
-              </a:spcAft>
-              <a:defRPr sz="1200">
-                <a:solidFill>
-                  <a:srgbClr val="1E293B"/>
-                </a:solidFill>
-              </a:defRPr>
-            </a:pPr>
-            <a:r>
-              <a:t>→ Scalar append .0: sysDescr.0</a:t>
-            </a:r>
-          </a:p>
-        </p:txBody>
-      </p:sp>
-      <p:sp>
-        <p:nvSpPr>
-          <p:cNvPr id="9" name="TextBox 8"/>
+              <a:t>✔ BER encodes variables into machine-independent Tag-Length-Value (TLV) binary streams.</a:t>
+            </a:r>
+          </a:p>
+        </p:txBody>
+      </p:sp>
+      <p:sp>
+        <p:nvSpPr>
+          <p:cNvPr id="10" name="TextBox 9"/>
           <p:cNvSpPr txBox="1"/>
           <p:nvPr/>
         </p:nvSpPr>
         <p:spPr>
           <a:xfrm>
-            <a:off x="731520" y="6309360"/>
-            <a:ext cx="10789920" cy="365760"/>
+            <a:off x="731520" y="6327648"/>
+            <a:ext cx="10789920" cy="320040"/>
           </a:xfrm>
           <a:prstGeom prst="rect">
             <a:avLst/>
@@ -4344,6 +4502,41 @@
             </a:pPr>
             <a:r>
               <a:t>PCCST501 Computer Networks | KTU 2024 Scheme | Prof. Anju Markose | Assistant Professor, Dept. of CSE | VJCET</a:t>
+            </a:r>
+          </a:p>
+        </p:txBody>
+      </p:sp>
+      <p:sp>
+        <p:nvSpPr>
+          <p:cNvPr id="11" name="TextBox 10"/>
+          <p:cNvSpPr txBox="1"/>
+          <p:nvPr/>
+        </p:nvSpPr>
+        <p:spPr>
+          <a:xfrm>
+            <a:off x="6858000" y="6327648"/>
+            <a:ext cx="4572000" cy="320040"/>
+          </a:xfrm>
+          <a:prstGeom prst="rect">
+            <a:avLst/>
+          </a:prstGeom>
+          <a:noFill/>
+        </p:spPr>
+        <p:txBody>
+          <a:bodyPr wrap="none">
+            <a:spAutoFit/>
+          </a:bodyPr>
+          <a:lstStyle/>
+          <a:p>
+            <a:pPr algn="r">
+              <a:defRPr sz="950">
+                <a:solidFill>
+                  <a:srgbClr val="64748B"/>
+                </a:solidFill>
+              </a:defRPr>
+            </a:pPr>
+            <a:r>
+              <a:t>Dept. of CSE, VJCET</a:t>
             </a:r>
           </a:p>
         </p:txBody>
